--- a/docs/media/slides.pptx
+++ b/docs/media/slides.pptx
@@ -3081,7 +3081,7 @@
                 <a:ea typeface="Calibri" pitchFamily="34" charset="-122"/>
                 <a:cs typeface="Calibri" pitchFamily="34" charset="-120"/>
               </a:rPr>
-              <a:t>   github.com/shi1720/afh-aws  ·  MIT licensed  ·  Strands Agents SDK  ·  Amazon Bedrock</a:t>
+              <a:t>   github.com/shi1720/epilogue  ·  MIT licensed  ·  Strands Agents SDK  ·  Amazon Bedrock</a:t>
             </a:r>
             <a:endParaRPr lang="en-US" sz="3000" dirty="0"/>
           </a:p>
